--- a/Smart_Procurement_Presentation.pptx
+++ b/Smart_Procurement_Presentation.pptx
@@ -9430,7 +9430,7 @@
         <a:p>
           <a:r>
             <a:rPr lang="en-US" dirty="0"/>
-            <a:t>Backend: Java 17, Spring Boot 3.x</a:t>
+            <a:t>Backend: Java 21, Spring Boot 3.x</a:t>
           </a:r>
         </a:p>
       </dgm:t>
@@ -9581,7 +9581,7 @@
         <a:lstStyle/>
         <a:p>
           <a:r>
-            <a:rPr lang="en-US"/>
+            <a:rPr lang="en-US" dirty="0"/>
             <a:t>Build Tool: Maven</a:t>
           </a:r>
         </a:p>
@@ -14359,7 +14359,7 @@
           </a:pPr>
           <a:r>
             <a:rPr lang="en-US" sz="1600" kern="1200" dirty="0"/>
-            <a:t>Backend: Java 17, Spring Boot 3.x</a:t>
+            <a:t>Backend: Java 21, Spring Boot 3.x</a:t>
           </a:r>
         </a:p>
       </dsp:txBody>
@@ -14802,7 +14802,7 @@
             <a:buNone/>
           </a:pPr>
           <a:r>
-            <a:rPr lang="en-US" sz="1600" kern="1200"/>
+            <a:rPr lang="en-US" sz="1600" kern="1200" dirty="0"/>
             <a:t>Build Tool: Maven</a:t>
           </a:r>
         </a:p>
@@ -36300,6 +36300,13 @@
               <a:schemeClr val="lt1"/>
             </a:fontRef>
           </p:style>
+          <p:txBody>
+            <a:bodyPr/>
+            <a:lstStyle/>
+            <a:p>
+              <a:endParaRPr lang="en-IN"/>
+            </a:p>
+          </p:txBody>
         </p:sp>
         <p:sp>
           <p:nvSpPr>
@@ -36363,6 +36370,13 @@
               <a:schemeClr val="lt1"/>
             </a:fontRef>
           </p:style>
+          <p:txBody>
+            <a:bodyPr/>
+            <a:lstStyle/>
+            <a:p>
+              <a:endParaRPr lang="en-IN"/>
+            </a:p>
+          </p:txBody>
         </p:sp>
         <p:sp>
           <p:nvSpPr>
@@ -36404,6 +36418,13 @@
               <a:schemeClr val="lt1"/>
             </a:fontRef>
           </p:style>
+          <p:txBody>
+            <a:bodyPr/>
+            <a:lstStyle/>
+            <a:p>
+              <a:endParaRPr lang="en-IN"/>
+            </a:p>
+          </p:txBody>
         </p:sp>
         <p:sp>
           <p:nvSpPr>
@@ -36468,6 +36489,13 @@
               <a:schemeClr val="lt1"/>
             </a:fontRef>
           </p:style>
+          <p:txBody>
+            <a:bodyPr/>
+            <a:lstStyle/>
+            <a:p>
+              <a:endParaRPr lang="en-IN"/>
+            </a:p>
+          </p:txBody>
         </p:sp>
         <p:sp>
           <p:nvSpPr>
@@ -36533,6 +36561,13 @@
               <a:schemeClr val="lt1"/>
             </a:fontRef>
           </p:style>
+          <p:txBody>
+            <a:bodyPr/>
+            <a:lstStyle/>
+            <a:p>
+              <a:endParaRPr lang="en-IN"/>
+            </a:p>
+          </p:txBody>
         </p:sp>
         <p:sp>
           <p:nvSpPr>
@@ -36596,6 +36631,13 @@
               <a:schemeClr val="lt1"/>
             </a:fontRef>
           </p:style>
+          <p:txBody>
+            <a:bodyPr/>
+            <a:lstStyle/>
+            <a:p>
+              <a:endParaRPr lang="en-IN"/>
+            </a:p>
+          </p:txBody>
         </p:sp>
         <p:sp>
           <p:nvSpPr>
@@ -36637,6 +36679,13 @@
               <a:schemeClr val="lt1"/>
             </a:fontRef>
           </p:style>
+          <p:txBody>
+            <a:bodyPr/>
+            <a:lstStyle/>
+            <a:p>
+              <a:endParaRPr lang="en-IN"/>
+            </a:p>
+          </p:txBody>
         </p:sp>
         <p:sp>
           <p:nvSpPr>
@@ -36678,6 +36727,13 @@
               <a:schemeClr val="lt1"/>
             </a:fontRef>
           </p:style>
+          <p:txBody>
+            <a:bodyPr/>
+            <a:lstStyle/>
+            <a:p>
+              <a:endParaRPr lang="en-IN"/>
+            </a:p>
+          </p:txBody>
         </p:sp>
       </p:grpSp>
       <p:sp>
@@ -36855,7 +36911,7 @@
           <a:p>
             <a:fld id="{5BCAD085-E8A6-8845-BD4E-CB4CCA059FC4}" type="datetimeFigureOut">
               <a:rPr lang="en-US" smtClean="0"/>
-              <a:t>19-Feb-26</a:t>
+              <a:t>27-Feb-26</a:t>
             </a:fld>
             <a:endParaRPr lang="en-US"/>
           </a:p>
@@ -37106,7 +37162,7 @@
           <a:p>
             <a:fld id="{5BCAD085-E8A6-8845-BD4E-CB4CCA059FC4}" type="datetimeFigureOut">
               <a:rPr lang="en-US" smtClean="0"/>
-              <a:t>19-Feb-26</a:t>
+              <a:t>27-Feb-26</a:t>
             </a:fld>
             <a:endParaRPr lang="en-US"/>
           </a:p>
@@ -37420,7 +37476,7 @@
           <a:p>
             <a:fld id="{5BCAD085-E8A6-8845-BD4E-CB4CCA059FC4}" type="datetimeFigureOut">
               <a:rPr lang="en-US" smtClean="0"/>
-              <a:t>19-Feb-26</a:t>
+              <a:t>27-Feb-26</a:t>
             </a:fld>
             <a:endParaRPr lang="en-US"/>
           </a:p>
@@ -37761,7 +37817,7 @@
           <a:p>
             <a:fld id="{5BCAD085-E8A6-8845-BD4E-CB4CCA059FC4}" type="datetimeFigureOut">
               <a:rPr lang="en-US" smtClean="0"/>
-              <a:t>19-Feb-26</a:t>
+              <a:t>27-Feb-26</a:t>
             </a:fld>
             <a:endParaRPr lang="en-US"/>
           </a:p>
@@ -38075,7 +38131,7 @@
           <a:p>
             <a:fld id="{5BCAD085-E8A6-8845-BD4E-CB4CCA059FC4}" type="datetimeFigureOut">
               <a:rPr lang="en-US" smtClean="0"/>
-              <a:t>19-Feb-26</a:t>
+              <a:t>27-Feb-26</a:t>
             </a:fld>
             <a:endParaRPr lang="en-US"/>
           </a:p>
@@ -38468,7 +38524,7 @@
           <a:p>
             <a:fld id="{5BCAD085-E8A6-8845-BD4E-CB4CCA059FC4}" type="datetimeFigureOut">
               <a:rPr lang="en-US" smtClean="0"/>
-              <a:t>19-Feb-26</a:t>
+              <a:t>27-Feb-26</a:t>
             </a:fld>
             <a:endParaRPr lang="en-US"/>
           </a:p>
@@ -38638,7 +38694,7 @@
           <a:p>
             <a:fld id="{5BCAD085-E8A6-8845-BD4E-CB4CCA059FC4}" type="datetimeFigureOut">
               <a:rPr lang="en-US" smtClean="0"/>
-              <a:t>19-Feb-26</a:t>
+              <a:t>27-Feb-26</a:t>
             </a:fld>
             <a:endParaRPr lang="en-US"/>
           </a:p>
@@ -38818,7 +38874,7 @@
           <a:p>
             <a:fld id="{5BCAD085-E8A6-8845-BD4E-CB4CCA059FC4}" type="datetimeFigureOut">
               <a:rPr lang="en-US" smtClean="0"/>
-              <a:t>19-Feb-26</a:t>
+              <a:t>27-Feb-26</a:t>
             </a:fld>
             <a:endParaRPr lang="en-US"/>
           </a:p>
@@ -38994,7 +39050,7 @@
           <a:p>
             <a:fld id="{5BCAD085-E8A6-8845-BD4E-CB4CCA059FC4}" type="datetimeFigureOut">
               <a:rPr lang="en-US" smtClean="0"/>
-              <a:t>19-Feb-26</a:t>
+              <a:t>27-Feb-26</a:t>
             </a:fld>
             <a:endParaRPr lang="en-US"/>
           </a:p>
@@ -39241,7 +39297,7 @@
           <a:p>
             <a:fld id="{5BCAD085-E8A6-8845-BD4E-CB4CCA059FC4}" type="datetimeFigureOut">
               <a:rPr lang="en-US" smtClean="0"/>
-              <a:t>19-Feb-26</a:t>
+              <a:t>27-Feb-26</a:t>
             </a:fld>
             <a:endParaRPr lang="en-US"/>
           </a:p>
@@ -39473,7 +39529,7 @@
           <a:p>
             <a:fld id="{5BCAD085-E8A6-8845-BD4E-CB4CCA059FC4}" type="datetimeFigureOut">
               <a:rPr lang="en-US" smtClean="0"/>
-              <a:t>19-Feb-26</a:t>
+              <a:t>27-Feb-26</a:t>
             </a:fld>
             <a:endParaRPr lang="en-US"/>
           </a:p>
@@ -39847,7 +39903,7 @@
           <a:p>
             <a:fld id="{5BCAD085-E8A6-8845-BD4E-CB4CCA059FC4}" type="datetimeFigureOut">
               <a:rPr lang="en-US" smtClean="0"/>
-              <a:t>19-Feb-26</a:t>
+              <a:t>27-Feb-26</a:t>
             </a:fld>
             <a:endParaRPr lang="en-US"/>
           </a:p>
@@ -39970,7 +40026,7 @@
           <a:p>
             <a:fld id="{5BCAD085-E8A6-8845-BD4E-CB4CCA059FC4}" type="datetimeFigureOut">
               <a:rPr lang="en-US" smtClean="0"/>
-              <a:t>19-Feb-26</a:t>
+              <a:t>27-Feb-26</a:t>
             </a:fld>
             <a:endParaRPr lang="en-US"/>
           </a:p>
@@ -40065,7 +40121,7 @@
           <a:p>
             <a:fld id="{5BCAD085-E8A6-8845-BD4E-CB4CCA059FC4}" type="datetimeFigureOut">
               <a:rPr lang="en-US" smtClean="0"/>
-              <a:t>19-Feb-26</a:t>
+              <a:t>27-Feb-26</a:t>
             </a:fld>
             <a:endParaRPr lang="en-US"/>
           </a:p>
@@ -40320,7 +40376,7 @@
           <a:p>
             <a:fld id="{5BCAD085-E8A6-8845-BD4E-CB4CCA059FC4}" type="datetimeFigureOut">
               <a:rPr lang="en-US" smtClean="0"/>
-              <a:t>19-Feb-26</a:t>
+              <a:t>27-Feb-26</a:t>
             </a:fld>
             <a:endParaRPr lang="en-US"/>
           </a:p>
@@ -40583,7 +40639,7 @@
           <a:p>
             <a:fld id="{5BCAD085-E8A6-8845-BD4E-CB4CCA059FC4}" type="datetimeFigureOut">
               <a:rPr lang="en-US" smtClean="0"/>
-              <a:t>19-Feb-26</a:t>
+              <a:t>27-Feb-26</a:t>
             </a:fld>
             <a:endParaRPr lang="en-US"/>
           </a:p>
@@ -40816,6 +40872,13 @@
               <a:schemeClr val="lt1"/>
             </a:fontRef>
           </p:style>
+          <p:txBody>
+            <a:bodyPr/>
+            <a:lstStyle/>
+            <a:p>
+              <a:endParaRPr lang="en-IN"/>
+            </a:p>
+          </p:txBody>
         </p:sp>
         <p:sp>
           <p:nvSpPr>
@@ -40879,6 +40942,13 @@
               <a:schemeClr val="lt1"/>
             </a:fontRef>
           </p:style>
+          <p:txBody>
+            <a:bodyPr/>
+            <a:lstStyle/>
+            <a:p>
+              <a:endParaRPr lang="en-IN"/>
+            </a:p>
+          </p:txBody>
         </p:sp>
         <p:sp>
           <p:nvSpPr>
@@ -40920,6 +40990,13 @@
               <a:schemeClr val="lt1"/>
             </a:fontRef>
           </p:style>
+          <p:txBody>
+            <a:bodyPr/>
+            <a:lstStyle/>
+            <a:p>
+              <a:endParaRPr lang="en-IN"/>
+            </a:p>
+          </p:txBody>
         </p:sp>
         <p:sp>
           <p:nvSpPr>
@@ -40984,6 +41061,13 @@
               <a:schemeClr val="lt1"/>
             </a:fontRef>
           </p:style>
+          <p:txBody>
+            <a:bodyPr/>
+            <a:lstStyle/>
+            <a:p>
+              <a:endParaRPr lang="en-IN"/>
+            </a:p>
+          </p:txBody>
         </p:sp>
         <p:sp>
           <p:nvSpPr>
@@ -41049,6 +41133,13 @@
               <a:schemeClr val="lt1"/>
             </a:fontRef>
           </p:style>
+          <p:txBody>
+            <a:bodyPr/>
+            <a:lstStyle/>
+            <a:p>
+              <a:endParaRPr lang="en-IN"/>
+            </a:p>
+          </p:txBody>
         </p:sp>
         <p:sp>
           <p:nvSpPr>
@@ -41112,6 +41203,13 @@
               <a:schemeClr val="lt1"/>
             </a:fontRef>
           </p:style>
+          <p:txBody>
+            <a:bodyPr/>
+            <a:lstStyle/>
+            <a:p>
+              <a:endParaRPr lang="en-IN"/>
+            </a:p>
+          </p:txBody>
         </p:sp>
         <p:sp>
           <p:nvSpPr>
@@ -41153,6 +41251,13 @@
               <a:schemeClr val="lt1"/>
             </a:fontRef>
           </p:style>
+          <p:txBody>
+            <a:bodyPr/>
+            <a:lstStyle/>
+            <a:p>
+              <a:endParaRPr lang="en-IN"/>
+            </a:p>
+          </p:txBody>
         </p:sp>
         <p:sp>
           <p:nvSpPr>
@@ -41194,6 +41299,13 @@
               <a:schemeClr val="lt1"/>
             </a:fontRef>
           </p:style>
+          <p:txBody>
+            <a:bodyPr/>
+            <a:lstStyle/>
+            <a:p>
+              <a:endParaRPr lang="en-IN"/>
+            </a:p>
+          </p:txBody>
         </p:sp>
       </p:grpSp>
       <p:sp>
@@ -41326,7 +41438,7 @@
           <a:p>
             <a:fld id="{5BCAD085-E8A6-8845-BD4E-CB4CCA059FC4}" type="datetimeFigureOut">
               <a:rPr lang="en-US" smtClean="0"/>
-              <a:t>19-Feb-26</a:t>
+              <a:t>27-Feb-26</a:t>
             </a:fld>
             <a:endParaRPr lang="en-US"/>
           </a:p>
@@ -46925,7 +47037,7 @@
             <p:ph idx="1"/>
             <p:extLst>
               <p:ext uri="{D42A27DB-BD31-4B8C-83A1-F6EECF244321}">
-                <p14:modId xmlns:p14="http://schemas.microsoft.com/office/powerpoint/2010/main" val="3002402730"/>
+                <p14:modId xmlns:p14="http://schemas.microsoft.com/office/powerpoint/2010/main" val="2209751953"/>
               </p:ext>
             </p:extLst>
           </p:nvPr>
